--- a/classes/parte-14-grc-riesgo-y-cumplimiento/276-gobernanza-de-la-seguridad-de-la-informacion/clase-276-presentacion.pptx
+++ b/classes/parte-14-grc-riesgo-y-cumplimiento/276-gobernanza-de-la-seguridad-de-la-informacion/clase-276-presentacion.pptx
@@ -17,6 +17,10 @@
     <p:sldId id="265" r:id="rId16"/>
     <p:sldId id="266" r:id="rId17"/>
     <p:sldId id="267" r:id="rId18"/>
+    <p:sldId id="268" r:id="rId19"/>
+    <p:sldId id="269" r:id="rId20"/>
+    <p:sldId id="270" r:id="rId21"/>
+    <p:sldId id="271" r:id="rId22"/>
   </p:sldIdLst>
   <p:sldSz cx="9144000" cy="6858000" type="screen4x3"/>
   <p:notesSz cx="6858000" cy="9144000"/>
@@ -3198,7 +3202,7 @@
                   <a:srgbClr val="0B3D2E"/>
                 </a:solidFill>
               </a:rPr>
-              <a:t>⚠️ Errores comunes</a:t>
+              <a:t>🧪 Laboratorio guiado (ejercicio aplicado)</a:t>
             </a:r>
           </a:p>
         </p:txBody>
@@ -3236,67 +3240,97 @@
                   <a:srgbClr val="22282E"/>
                 </a:solidFill>
               </a:rPr>
-              <a:t>•  "El programa de seguridad no tiene presupuesto" — Falta patrocinio de la dirección; construye caso de negocio y gobierno top-down</a:t>
-            </a:r>
-          </a:p>
-          <a:p>
-            <a:pPr>
-              <a:spcAft>
-                <a:spcPts val="600"/>
-              </a:spcAft>
-            </a:pPr>
-            <a:r>
-              <a:rPr sz="1500">
-                <a:solidFill>
-                  <a:srgbClr val="22282E"/>
-                </a:solidFill>
-              </a:rPr>
-              <a:t>•  Nadie decide sobre excepciones de riesgo — No hay comité ni autoridad definida; crea el charter y asigna el aprobador</a:t>
-            </a:r>
-          </a:p>
-          <a:p>
-            <a:pPr>
-              <a:spcAft>
-                <a:spcPts val="600"/>
-              </a:spcAft>
-            </a:pPr>
-            <a:r>
-              <a:rPr sz="1500">
-                <a:solidFill>
-                  <a:srgbClr val="22282E"/>
-                </a:solidFill>
-              </a:rPr>
-              <a:t>•  Controles técnicos sin dueño de negocio — Se confunde custodio con propietario; asigna propietarios de datos</a:t>
-            </a:r>
-          </a:p>
-          <a:p>
-            <a:pPr>
-              <a:spcAft>
-                <a:spcPts val="600"/>
-              </a:spcAft>
-            </a:pPr>
-            <a:r>
-              <a:rPr sz="1500">
-                <a:solidFill>
-                  <a:srgbClr val="22282E"/>
-                </a:solidFill>
-              </a:rPr>
-              <a:t>•  Apetito de riesgo indefinido — Cada equipo decide por su cuenta; formaliza la declaración de apetito</a:t>
-            </a:r>
-          </a:p>
-          <a:p>
-            <a:pPr>
-              <a:spcAft>
-                <a:spcPts val="600"/>
-              </a:spcAft>
-            </a:pPr>
-            <a:r>
-              <a:rPr sz="1500">
-                <a:solidFill>
-                  <a:srgbClr val="22282E"/>
-                </a:solidFill>
-              </a:rPr>
-              <a:t>•  Directivos no rinden cuentas tras un incidente — Falta due care documentado; registra decisiones y aprobaciones</a:t>
+              <a:t>•  Vas a construir la estructura de gobierno de seguridad de una empresa ficticia, "Ferretería del Sur S.A.", PYME de e-commerce con 120 empleados que procesa pagos con tarjeta.</a:t>
+            </a:r>
+          </a:p>
+          <a:p>
+            <a:pPr>
+              <a:spcAft>
+                <a:spcPts val="600"/>
+              </a:spcAft>
+            </a:pPr>
+            <a:r>
+              <a:rPr sz="1500">
+                <a:solidFill>
+                  <a:srgbClr val="22282E"/>
+                </a:solidFill>
+              </a:rPr>
+              <a:t>•  Contexto: anota en un documento el sector, tamaño, activos críticos (plataforma web, base de datos de clientes, pasarela de pago) y las 3 amenazas que más preocupan a la dirección.</a:t>
+            </a:r>
+          </a:p>
+          <a:p>
+            <a:pPr>
+              <a:spcAft>
+                <a:spcPts val="600"/>
+              </a:spcAft>
+            </a:pPr>
+            <a:r>
+              <a:rPr sz="1500">
+                <a:solidFill>
+                  <a:srgbClr val="22282E"/>
+                </a:solidFill>
+              </a:rPr>
+              <a:t>•  Matriz RACI de roles: en una hoja de cálculo crea filas para 6 actividades (definir política, aprobar presupuesto, clasificar datos, operar el SIEM, aprobar excepciones de riesgo, responder…</a:t>
+            </a:r>
+          </a:p>
+          <a:p>
+            <a:pPr>
+              <a:spcAft>
+                <a:spcPts val="600"/>
+              </a:spcAft>
+            </a:pPr>
+            <a:r>
+              <a:rPr sz="1500">
+                <a:solidFill>
+                  <a:srgbClr val="22282E"/>
+                </a:solidFill>
+              </a:rPr>
+              <a:t>•  Apetito de riesgo: redacta una declaración de apetito en una frase (p. ej., "aceptamos riesgo bajo en disponibilidad y riesgo muy bajo en confidencialidad de datos de pago").</a:t>
+            </a:r>
+          </a:p>
+          <a:p>
+            <a:pPr>
+              <a:spcAft>
+                <a:spcPts val="600"/>
+              </a:spcAft>
+            </a:pPr>
+            <a:r>
+              <a:rPr sz="1500">
+                <a:solidFill>
+                  <a:srgbClr val="22282E"/>
+                </a:solidFill>
+              </a:rPr>
+              <a:t>•  Objetivos alineados: escribe una tabla de 3 filas que conecte un objetivo de negocio (crecer 30% en ventas online) con un objetivo de seguridad (disponibilidad 99,9%) y un control concreto (WAF +…</a:t>
+            </a:r>
+          </a:p>
+          <a:p>
+            <a:pPr>
+              <a:spcAft>
+                <a:spcPts val="600"/>
+              </a:spcAft>
+            </a:pPr>
+            <a:r>
+              <a:rPr sz="1500">
+                <a:solidFill>
+                  <a:srgbClr val="22282E"/>
+                </a:solidFill>
+              </a:rPr>
+              <a:t>•  Charter del comité: redacta media página con: propósito, miembros, frecuencia de reunión, decisiones que puede tomar y a quién reporta.</a:t>
+            </a:r>
+          </a:p>
+          <a:p>
+            <a:pPr>
+              <a:spcAft>
+                <a:spcPts val="600"/>
+              </a:spcAft>
+            </a:pPr>
+            <a:r>
+              <a:rPr sz="1500">
+                <a:solidFill>
+                  <a:srgbClr val="22282E"/>
+                </a:solidFill>
+              </a:rPr>
+              <a:t>•  Revisión: verifica que ningún rol técnico aparezca como aprobador de decisiones estratégicas (eso es un error de gobierno).</a:t>
             </a:r>
           </a:p>
         </p:txBody>
@@ -3347,7 +3381,7 @@
                   <a:srgbClr val="0B3D2E"/>
                 </a:solidFill>
               </a:rPr>
-              <a:t>❓ Preguntas frecuentes</a:t>
+              <a:t>✍️ Ejercicios</a:t>
             </a:r>
           </a:p>
         </p:txBody>
@@ -3385,97 +3419,82 @@
                   <a:srgbClr val="22282E"/>
                 </a:solidFill>
               </a:rPr>
-              <a:t>•  ❓ ¿La gobernanza no es solo burocracia?</a:t>
-            </a:r>
-          </a:p>
-          <a:p>
-            <a:pPr>
-              <a:spcAft>
-                <a:spcPts val="600"/>
-              </a:spcAft>
-            </a:pPr>
-            <a:r>
-              <a:rPr sz="1500">
-                <a:solidFill>
-                  <a:srgbClr val="22282E"/>
-                </a:solidFill>
-              </a:rPr>
-              <a:t>•  No: es lo que da autoridad, presupuesto y dirección a la seguridad. Sin ella, los controles técnicos carecen de respaldo y se abandonan.</a:t>
-            </a:r>
-          </a:p>
-          <a:p>
-            <a:pPr>
-              <a:spcAft>
-                <a:spcPts val="600"/>
-              </a:spcAft>
-            </a:pPr>
-            <a:r>
-              <a:rPr sz="1500">
-                <a:solidFill>
-                  <a:srgbClr val="22282E"/>
-                </a:solidFill>
-              </a:rPr>
-              <a:t>•  ❓ ¿Quién debe ser el CISO, técnico o gestor?</a:t>
-            </a:r>
-          </a:p>
-          <a:p>
-            <a:pPr>
-              <a:spcAft>
-                <a:spcPts val="600"/>
-              </a:spcAft>
-            </a:pPr>
-            <a:r>
-              <a:rPr sz="1500">
-                <a:solidFill>
-                  <a:srgbClr val="22282E"/>
-                </a:solidFill>
-              </a:rPr>
-              <a:t>•  Ambos perfiles existen, pero el CISO opera en la capa de gobierno y gestión: traduce riesgo técnico a lenguaje de negocio ante la dirección.</a:t>
-            </a:r>
-          </a:p>
-          <a:p>
-            <a:pPr>
-              <a:spcAft>
-                <a:spcPts val="600"/>
-              </a:spcAft>
-            </a:pPr>
-            <a:r>
-              <a:rPr sz="1500">
-                <a:solidFill>
-                  <a:srgbClr val="22282E"/>
-                </a:solidFill>
-              </a:rPr>
-              <a:t>•  ❓ ¿Apetito y tolerancia son lo mismo?</a:t>
-            </a:r>
-          </a:p>
-          <a:p>
-            <a:pPr>
-              <a:spcAft>
-                <a:spcPts val="600"/>
-              </a:spcAft>
-            </a:pPr>
-            <a:r>
-              <a:rPr sz="1500">
-                <a:solidFill>
-                  <a:srgbClr val="22282E"/>
-                </a:solidFill>
-              </a:rPr>
-              <a:t>•  No. El apetito es el nivel general que aceptas; la tolerancia es la desviación admisible para un riesgo específico.</a:t>
-            </a:r>
-          </a:p>
-          <a:p>
-            <a:pPr>
-              <a:spcAft>
-                <a:spcPts val="600"/>
-              </a:spcAft>
-            </a:pPr>
-            <a:r>
-              <a:rPr sz="1500">
-                <a:solidFill>
-                  <a:srgbClr val="22282E"/>
-                </a:solidFill>
-              </a:rPr>
-              <a:t>•  ❓ ¿Dónde encaja ISO 27001 en la gobernanza?</a:t>
+              <a:t>•  Explica con un ejemplo la diferencia entre due care y due diligence.</a:t>
+            </a:r>
+          </a:p>
+          <a:p>
+            <a:pPr>
+              <a:spcAft>
+                <a:spcPts val="600"/>
+              </a:spcAft>
+            </a:pPr>
+            <a:r>
+              <a:rPr sz="1500">
+                <a:solidFill>
+                  <a:srgbClr val="22282E"/>
+                </a:solidFill>
+              </a:rPr>
+              <a:t>•  Clasifica estas tareas en gobernanza, gestión u operación: aprobar el presupuesto anual, configurar un firewall, definir el apetito de riesgo, revisar logs.</a:t>
+            </a:r>
+          </a:p>
+          <a:p>
+            <a:pPr>
+              <a:spcAft>
+                <a:spcPts val="600"/>
+              </a:spcAft>
+            </a:pPr>
+            <a:r>
+              <a:rPr sz="1500">
+                <a:solidFill>
+                  <a:srgbClr val="22282E"/>
+                </a:solidFill>
+              </a:rPr>
+              <a:t>•  Diseña una matriz RACI para el proceso "gestión de parches".</a:t>
+            </a:r>
+          </a:p>
+          <a:p>
+            <a:pPr>
+              <a:spcAft>
+                <a:spcPts val="600"/>
+              </a:spcAft>
+            </a:pPr>
+            <a:r>
+              <a:rPr sz="1500">
+                <a:solidFill>
+                  <a:srgbClr val="22282E"/>
+                </a:solidFill>
+              </a:rPr>
+              <a:t>•  Un directivo dice: "la seguridad es cosa del departamento de IT". Redacta una réplica de 5 líneas fundamentada en gobernanza top-down.</a:t>
+            </a:r>
+          </a:p>
+          <a:p>
+            <a:pPr>
+              <a:spcAft>
+                <a:spcPts val="600"/>
+              </a:spcAft>
+            </a:pPr>
+            <a:r>
+              <a:rPr sz="1500">
+                <a:solidFill>
+                  <a:srgbClr val="22282E"/>
+                </a:solidFill>
+              </a:rPr>
+              <a:t>•  Define el apetito de riesgo para un hospital y para una startup de videojuegos; justifica por qué difieren.</a:t>
+            </a:r>
+          </a:p>
+          <a:p>
+            <a:pPr>
+              <a:spcAft>
+                <a:spcPts val="600"/>
+              </a:spcAft>
+            </a:pPr>
+            <a:r>
+              <a:rPr sz="1500">
+                <a:solidFill>
+                  <a:srgbClr val="22282E"/>
+                </a:solidFill>
+              </a:rPr>
+              <a:t>•  Propón tres indicadores que un comité de seguridad debería revisar en cada reunión.</a:t>
             </a:r>
           </a:p>
         </p:txBody>
@@ -3526,7 +3545,7 @@
                   <a:srgbClr val="0B3D2E"/>
                 </a:solidFill>
               </a:rPr>
-              <a:t>🔗 Referencias</a:t>
+              <a:t>📝 Reto verificable</a:t>
             </a:r>
           </a:p>
         </p:txBody>
@@ -3564,6 +3583,438 @@
                   <a:srgbClr val="22282E"/>
                 </a:solidFill>
               </a:rPr>
+              <a:t>•  Redacta el charter completo de un comité de seguridad de la información (máx. 1 página) para "Ferretería del Sur S.A.", con matriz RACI adjunta.</a:t>
+            </a:r>
+          </a:p>
+          <a:p>
+            <a:pPr>
+              <a:spcAft>
+                <a:spcPts val="600"/>
+              </a:spcAft>
+            </a:pPr>
+            <a:r>
+              <a:rPr sz="1500">
+                <a:solidFill>
+                  <a:srgbClr val="22282E"/>
+                </a:solidFill>
+              </a:rPr>
+              <a:t>•  Criterio de aceptación: el charter incluye propósito, composición, cadencia, autoridad de decisión y línea de reporte a la junta; la matriz RACI tiene exactamente un aprobador por actividad y ningún…</a:t>
+            </a:r>
+          </a:p>
+        </p:txBody>
+      </p:sp>
+    </p:spTree>
+  </p:cSld>
+  <p:clrMapOvr>
+    <a:masterClrMapping/>
+  </p:clrMapOvr>
+</p:sld>
+</file>
+
+<file path=ppt/slides/slide13.xml><?xml version="1.0" encoding="utf-8"?>
+<p:sld xmlns:a="http://schemas.openxmlformats.org/drawingml/2006/main" xmlns:p="http://schemas.openxmlformats.org/presentationml/2006/main" xmlns:r="http://schemas.openxmlformats.org/officeDocument/2006/relationships">
+  <p:cSld>
+    <p:spTree>
+      <p:nvGrpSpPr>
+        <p:cNvPr id="1" name=""/>
+        <p:cNvGrpSpPr/>
+        <p:nvPr/>
+      </p:nvGrpSpPr>
+      <p:grpSpPr/>
+      <p:sp>
+        <p:nvSpPr>
+          <p:cNvPr id="2" name="TextBox 1"/>
+          <p:cNvSpPr txBox="1"/>
+          <p:nvPr/>
+        </p:nvSpPr>
+        <p:spPr>
+          <a:xfrm>
+            <a:off x="457200" y="320040"/>
+            <a:ext cx="8229600" cy="822960"/>
+          </a:xfrm>
+          <a:prstGeom prst="rect">
+            <a:avLst/>
+          </a:prstGeom>
+          <a:noFill/>
+        </p:spPr>
+        <p:txBody>
+          <a:bodyPr wrap="square">
+            <a:spAutoFit/>
+          </a:bodyPr>
+          <a:lstStyle/>
+          <a:p>
+            <a:r>
+              <a:rPr sz="2600" b="1">
+                <a:solidFill>
+                  <a:srgbClr val="0B3D2E"/>
+                </a:solidFill>
+              </a:rPr>
+              <a:t>⚠️ Errores comunes</a:t>
+            </a:r>
+          </a:p>
+        </p:txBody>
+      </p:sp>
+      <p:sp>
+        <p:nvSpPr>
+          <p:cNvPr id="3" name="TextBox 2"/>
+          <p:cNvSpPr txBox="1"/>
+          <p:nvPr/>
+        </p:nvSpPr>
+        <p:spPr>
+          <a:xfrm>
+            <a:off x="457200" y="1280160"/>
+            <a:ext cx="8229600" cy="4937760"/>
+          </a:xfrm>
+          <a:prstGeom prst="rect">
+            <a:avLst/>
+          </a:prstGeom>
+          <a:noFill/>
+        </p:spPr>
+        <p:txBody>
+          <a:bodyPr wrap="square">
+            <a:spAutoFit/>
+          </a:bodyPr>
+          <a:lstStyle/>
+          <a:p>
+            <a:pPr>
+              <a:spcAft>
+                <a:spcPts val="600"/>
+              </a:spcAft>
+            </a:pPr>
+            <a:r>
+              <a:rPr sz="1500">
+                <a:solidFill>
+                  <a:srgbClr val="22282E"/>
+                </a:solidFill>
+              </a:rPr>
+              <a:t>•  "El programa de seguridad no tiene presupuesto" — Falta patrocinio de la dirección; construye caso de negocio y gobierno top-down</a:t>
+            </a:r>
+          </a:p>
+          <a:p>
+            <a:pPr>
+              <a:spcAft>
+                <a:spcPts val="600"/>
+              </a:spcAft>
+            </a:pPr>
+            <a:r>
+              <a:rPr sz="1500">
+                <a:solidFill>
+                  <a:srgbClr val="22282E"/>
+                </a:solidFill>
+              </a:rPr>
+              <a:t>•  Nadie decide sobre excepciones de riesgo — No hay comité ni autoridad definida; crea el charter y asigna el aprobador</a:t>
+            </a:r>
+          </a:p>
+          <a:p>
+            <a:pPr>
+              <a:spcAft>
+                <a:spcPts val="600"/>
+              </a:spcAft>
+            </a:pPr>
+            <a:r>
+              <a:rPr sz="1500">
+                <a:solidFill>
+                  <a:srgbClr val="22282E"/>
+                </a:solidFill>
+              </a:rPr>
+              <a:t>•  Controles técnicos sin dueño de negocio — Se confunde custodio con propietario; asigna propietarios de datos</a:t>
+            </a:r>
+          </a:p>
+          <a:p>
+            <a:pPr>
+              <a:spcAft>
+                <a:spcPts val="600"/>
+              </a:spcAft>
+            </a:pPr>
+            <a:r>
+              <a:rPr sz="1500">
+                <a:solidFill>
+                  <a:srgbClr val="22282E"/>
+                </a:solidFill>
+              </a:rPr>
+              <a:t>•  Apetito de riesgo indefinido — Cada equipo decide por su cuenta; formaliza la declaración de apetito</a:t>
+            </a:r>
+          </a:p>
+          <a:p>
+            <a:pPr>
+              <a:spcAft>
+                <a:spcPts val="600"/>
+              </a:spcAft>
+            </a:pPr>
+            <a:r>
+              <a:rPr sz="1500">
+                <a:solidFill>
+                  <a:srgbClr val="22282E"/>
+                </a:solidFill>
+              </a:rPr>
+              <a:t>•  Directivos no rinden cuentas tras un incidente — Falta due care documentado; registra decisiones y aprobaciones</a:t>
+            </a:r>
+          </a:p>
+        </p:txBody>
+      </p:sp>
+    </p:spTree>
+  </p:cSld>
+  <p:clrMapOvr>
+    <a:masterClrMapping/>
+  </p:clrMapOvr>
+</p:sld>
+</file>
+
+<file path=ppt/slides/slide14.xml><?xml version="1.0" encoding="utf-8"?>
+<p:sld xmlns:a="http://schemas.openxmlformats.org/drawingml/2006/main" xmlns:p="http://schemas.openxmlformats.org/presentationml/2006/main" xmlns:r="http://schemas.openxmlformats.org/officeDocument/2006/relationships">
+  <p:cSld>
+    <p:spTree>
+      <p:nvGrpSpPr>
+        <p:cNvPr id="1" name=""/>
+        <p:cNvGrpSpPr/>
+        <p:nvPr/>
+      </p:nvGrpSpPr>
+      <p:grpSpPr/>
+      <p:sp>
+        <p:nvSpPr>
+          <p:cNvPr id="2" name="TextBox 1"/>
+          <p:cNvSpPr txBox="1"/>
+          <p:nvPr/>
+        </p:nvSpPr>
+        <p:spPr>
+          <a:xfrm>
+            <a:off x="457200" y="320040"/>
+            <a:ext cx="8229600" cy="822960"/>
+          </a:xfrm>
+          <a:prstGeom prst="rect">
+            <a:avLst/>
+          </a:prstGeom>
+          <a:noFill/>
+        </p:spPr>
+        <p:txBody>
+          <a:bodyPr wrap="square">
+            <a:spAutoFit/>
+          </a:bodyPr>
+          <a:lstStyle/>
+          <a:p>
+            <a:r>
+              <a:rPr sz="2600" b="1">
+                <a:solidFill>
+                  <a:srgbClr val="0B3D2E"/>
+                </a:solidFill>
+              </a:rPr>
+              <a:t>❓ Preguntas frecuentes</a:t>
+            </a:r>
+          </a:p>
+        </p:txBody>
+      </p:sp>
+      <p:sp>
+        <p:nvSpPr>
+          <p:cNvPr id="3" name="TextBox 2"/>
+          <p:cNvSpPr txBox="1"/>
+          <p:nvPr/>
+        </p:nvSpPr>
+        <p:spPr>
+          <a:xfrm>
+            <a:off x="457200" y="1280160"/>
+            <a:ext cx="8229600" cy="4937760"/>
+          </a:xfrm>
+          <a:prstGeom prst="rect">
+            <a:avLst/>
+          </a:prstGeom>
+          <a:noFill/>
+        </p:spPr>
+        <p:txBody>
+          <a:bodyPr wrap="square">
+            <a:spAutoFit/>
+          </a:bodyPr>
+          <a:lstStyle/>
+          <a:p>
+            <a:pPr>
+              <a:spcAft>
+                <a:spcPts val="600"/>
+              </a:spcAft>
+            </a:pPr>
+            <a:r>
+              <a:rPr sz="1500">
+                <a:solidFill>
+                  <a:srgbClr val="22282E"/>
+                </a:solidFill>
+              </a:rPr>
+              <a:t>•  ❓ ¿La gobernanza no es solo burocracia?</a:t>
+            </a:r>
+          </a:p>
+          <a:p>
+            <a:pPr>
+              <a:spcAft>
+                <a:spcPts val="600"/>
+              </a:spcAft>
+            </a:pPr>
+            <a:r>
+              <a:rPr sz="1500">
+                <a:solidFill>
+                  <a:srgbClr val="22282E"/>
+                </a:solidFill>
+              </a:rPr>
+              <a:t>•  No: es lo que da autoridad, presupuesto y dirección a la seguridad. Sin ella, los controles técnicos carecen de respaldo y se abandonan.</a:t>
+            </a:r>
+          </a:p>
+          <a:p>
+            <a:pPr>
+              <a:spcAft>
+                <a:spcPts val="600"/>
+              </a:spcAft>
+            </a:pPr>
+            <a:r>
+              <a:rPr sz="1500">
+                <a:solidFill>
+                  <a:srgbClr val="22282E"/>
+                </a:solidFill>
+              </a:rPr>
+              <a:t>•  ❓ ¿Quién debe ser el CISO, técnico o gestor?</a:t>
+            </a:r>
+          </a:p>
+          <a:p>
+            <a:pPr>
+              <a:spcAft>
+                <a:spcPts val="600"/>
+              </a:spcAft>
+            </a:pPr>
+            <a:r>
+              <a:rPr sz="1500">
+                <a:solidFill>
+                  <a:srgbClr val="22282E"/>
+                </a:solidFill>
+              </a:rPr>
+              <a:t>•  Ambos perfiles existen, pero el CISO opera en la capa de gobierno y gestión: traduce riesgo técnico a lenguaje de negocio ante la dirección.</a:t>
+            </a:r>
+          </a:p>
+          <a:p>
+            <a:pPr>
+              <a:spcAft>
+                <a:spcPts val="600"/>
+              </a:spcAft>
+            </a:pPr>
+            <a:r>
+              <a:rPr sz="1500">
+                <a:solidFill>
+                  <a:srgbClr val="22282E"/>
+                </a:solidFill>
+              </a:rPr>
+              <a:t>•  ❓ ¿Apetito y tolerancia son lo mismo?</a:t>
+            </a:r>
+          </a:p>
+          <a:p>
+            <a:pPr>
+              <a:spcAft>
+                <a:spcPts val="600"/>
+              </a:spcAft>
+            </a:pPr>
+            <a:r>
+              <a:rPr sz="1500">
+                <a:solidFill>
+                  <a:srgbClr val="22282E"/>
+                </a:solidFill>
+              </a:rPr>
+              <a:t>•  No. El apetito es el nivel general que aceptas; la tolerancia es la desviación admisible para un riesgo específico.</a:t>
+            </a:r>
+          </a:p>
+          <a:p>
+            <a:pPr>
+              <a:spcAft>
+                <a:spcPts val="600"/>
+              </a:spcAft>
+            </a:pPr>
+            <a:r>
+              <a:rPr sz="1500">
+                <a:solidFill>
+                  <a:srgbClr val="22282E"/>
+                </a:solidFill>
+              </a:rPr>
+              <a:t>•  ❓ ¿Dónde encaja ISO 27001 en la gobernanza?</a:t>
+            </a:r>
+          </a:p>
+        </p:txBody>
+      </p:sp>
+    </p:spTree>
+  </p:cSld>
+  <p:clrMapOvr>
+    <a:masterClrMapping/>
+  </p:clrMapOvr>
+</p:sld>
+</file>
+
+<file path=ppt/slides/slide15.xml><?xml version="1.0" encoding="utf-8"?>
+<p:sld xmlns:a="http://schemas.openxmlformats.org/drawingml/2006/main" xmlns:p="http://schemas.openxmlformats.org/presentationml/2006/main" xmlns:r="http://schemas.openxmlformats.org/officeDocument/2006/relationships">
+  <p:cSld>
+    <p:spTree>
+      <p:nvGrpSpPr>
+        <p:cNvPr id="1" name=""/>
+        <p:cNvGrpSpPr/>
+        <p:nvPr/>
+      </p:nvGrpSpPr>
+      <p:grpSpPr/>
+      <p:sp>
+        <p:nvSpPr>
+          <p:cNvPr id="2" name="TextBox 1"/>
+          <p:cNvSpPr txBox="1"/>
+          <p:nvPr/>
+        </p:nvSpPr>
+        <p:spPr>
+          <a:xfrm>
+            <a:off x="457200" y="320040"/>
+            <a:ext cx="8229600" cy="822960"/>
+          </a:xfrm>
+          <a:prstGeom prst="rect">
+            <a:avLst/>
+          </a:prstGeom>
+          <a:noFill/>
+        </p:spPr>
+        <p:txBody>
+          <a:bodyPr wrap="square">
+            <a:spAutoFit/>
+          </a:bodyPr>
+          <a:lstStyle/>
+          <a:p>
+            <a:r>
+              <a:rPr sz="2600" b="1">
+                <a:solidFill>
+                  <a:srgbClr val="0B3D2E"/>
+                </a:solidFill>
+              </a:rPr>
+              <a:t>🔗 Referencias</a:t>
+            </a:r>
+          </a:p>
+        </p:txBody>
+      </p:sp>
+      <p:sp>
+        <p:nvSpPr>
+          <p:cNvPr id="3" name="TextBox 2"/>
+          <p:cNvSpPr txBox="1"/>
+          <p:nvPr/>
+        </p:nvSpPr>
+        <p:spPr>
+          <a:xfrm>
+            <a:off x="457200" y="1280160"/>
+            <a:ext cx="8229600" cy="4937760"/>
+          </a:xfrm>
+          <a:prstGeom prst="rect">
+            <a:avLst/>
+          </a:prstGeom>
+          <a:noFill/>
+        </p:spPr>
+        <p:txBody>
+          <a:bodyPr wrap="square">
+            <a:spAutoFit/>
+          </a:bodyPr>
+          <a:lstStyle/>
+          <a:p>
+            <a:pPr>
+              <a:spcAft>
+                <a:spcPts val="600"/>
+              </a:spcAft>
+            </a:pPr>
+            <a:r>
+              <a:rPr sz="1500">
+                <a:solidFill>
+                  <a:srgbClr val="22282E"/>
+                </a:solidFill>
+              </a:rPr>
               <a:t>•  (ISC)² CISSP Official Study Guide, dominio 1 (Security and Risk Management).</a:t>
             </a:r>
           </a:p>
@@ -3629,6 +4080,81 @@
           </a:p>
         </p:txBody>
       </p:sp>
+    </p:spTree>
+  </p:cSld>
+  <p:clrMapOvr>
+    <a:masterClrMapping/>
+  </p:clrMapOvr>
+</p:sld>
+</file>
+
+<file path=ppt/slides/slide16.xml><?xml version="1.0" encoding="utf-8"?>
+<p:sld xmlns:a="http://schemas.openxmlformats.org/drawingml/2006/main" xmlns:p="http://schemas.openxmlformats.org/presentationml/2006/main" xmlns:r="http://schemas.openxmlformats.org/officeDocument/2006/relationships">
+  <p:cSld>
+    <p:spTree>
+      <p:nvGrpSpPr>
+        <p:cNvPr id="1" name=""/>
+        <p:cNvGrpSpPr/>
+        <p:nvPr/>
+      </p:nvGrpSpPr>
+      <p:grpSpPr/>
+      <p:sp>
+        <p:nvSpPr>
+          <p:cNvPr id="2" name="TextBox 1"/>
+          <p:cNvSpPr txBox="1"/>
+          <p:nvPr/>
+        </p:nvSpPr>
+        <p:spPr>
+          <a:xfrm>
+            <a:off x="457200" y="274320"/>
+            <a:ext cx="8229600" cy="640080"/>
+          </a:xfrm>
+          <a:prstGeom prst="rect">
+            <a:avLst/>
+          </a:prstGeom>
+          <a:noFill/>
+        </p:spPr>
+        <p:txBody>
+          <a:bodyPr wrap="square">
+            <a:spAutoFit/>
+          </a:bodyPr>
+          <a:lstStyle/>
+          <a:p>
+            <a:r>
+              <a:rPr sz="2200" b="1">
+                <a:solidFill>
+                  <a:srgbClr val="0B3D2E"/>
+                </a:solidFill>
+              </a:rPr>
+              <a:t>Diagrama de la clase</a:t>
+            </a:r>
+          </a:p>
+        </p:txBody>
+      </p:sp>
+      <p:pic>
+        <p:nvPicPr>
+          <p:cNvPr id="3" name="Picture 2" descr="89690c53ad44dafd.png"/>
+          <p:cNvPicPr>
+            <a:picLocks noChangeAspect="1"/>
+          </p:cNvPicPr>
+          <p:nvPr/>
+        </p:nvPicPr>
+        <p:blipFill>
+          <a:blip r:embed="rId2"/>
+          <a:stretch>
+            <a:fillRect/>
+          </a:stretch>
+        </p:blipFill>
+        <p:spPr>
+          <a:xfrm>
+            <a:off x="457200" y="3351276"/>
+            <a:ext cx="8229600" cy="795528"/>
+          </a:xfrm>
+          <a:prstGeom prst="rect">
+            <a:avLst/>
+          </a:prstGeom>
+        </p:spPr>
+      </p:pic>
     </p:spTree>
   </p:cSld>
   <p:clrMapOvr>
@@ -3713,7 +4239,7 @@
                   <a:srgbClr val="22282E"/>
                 </a:solidFill>
               </a:rPr>
-              <a:t>•  Comprender qué es la gobernanza de seguridad de la información y en qué se diferencia de la gestión operativa. Al terminar sabrás definir una estructura de gobierno con roles claros, alinear la seguridad con los objetivos de negocio y traducir la estrategia de la dirección en políticas y apetito de riesgo. Este es el marco que da sentido a todos los controles técnicos que has aprendido en el programa.</a:t>
+              <a:t>•  Comprender qué es la gobernanza de seguridad de la información y en qué se diferencia de la gestión operativa. Al terminar sabrás definir una estructura de gobierno con roles claros, alinear la…</a:t>
             </a:r>
           </a:p>
         </p:txBody>
@@ -4107,7 +4633,7 @@
                   <a:srgbClr val="0B3D2E"/>
                 </a:solidFill>
               </a:rPr>
-              <a:t>📖 Definiciones y características</a:t>
+              <a:t>🧠 Explicación en profundidad</a:t>
             </a:r>
           </a:p>
         </p:txBody>
@@ -4145,97 +4671,22 @@
                   <a:srgbClr val="22282E"/>
                 </a:solidFill>
               </a:rPr>
-              <a:t>•  Gobernanza de seguridad: conjunto de responsabilidades y prácticas ejercidas por la dirección para dar dirección estratégica, asegurar el logro de objetivos y verificar que el riesgo se gestiona. Característica clave: es responsabilidad de la alta dirección, no del equipo técnico.</a:t>
-            </a:r>
-          </a:p>
-          <a:p>
-            <a:pPr>
-              <a:spcAft>
-                <a:spcPts val="600"/>
-              </a:spcAft>
-            </a:pPr>
-            <a:r>
-              <a:rPr sz="1500">
-                <a:solidFill>
-                  <a:srgbClr val="22282E"/>
-                </a:solidFill>
-              </a:rPr>
-              <a:t>•  Apetito de riesgo (risk appetite): cantidad de riesgo que una organización está dispuesta a aceptar para perseguir sus objetivos. Clave: se define arriba, guía todas las decisiones de tratamiento.</a:t>
-            </a:r>
-          </a:p>
-          <a:p>
-            <a:pPr>
-              <a:spcAft>
-                <a:spcPts val="600"/>
-              </a:spcAft>
-            </a:pPr>
-            <a:r>
-              <a:rPr sz="1500">
-                <a:solidFill>
-                  <a:srgbClr val="22282E"/>
-                </a:solidFill>
-              </a:rPr>
-              <a:t>•  Tolerancia al riesgo: la variación aceptable respecto al apetito para un riesgo concreto. Clave: más granular que el apetito.</a:t>
-            </a:r>
-          </a:p>
-          <a:p>
-            <a:pPr>
-              <a:spcAft>
-                <a:spcPts val="600"/>
-              </a:spcAft>
-            </a:pPr>
-            <a:r>
-              <a:rPr sz="1500">
-                <a:solidFill>
-                  <a:srgbClr val="22282E"/>
-                </a:solidFill>
-              </a:rPr>
-              <a:t>•  Due care: actuar de forma razonable y prudente para proteger los intereses de la organización. Clave: "hacer lo correcto".</a:t>
-            </a:r>
-          </a:p>
-          <a:p>
-            <a:pPr>
-              <a:spcAft>
-                <a:spcPts val="600"/>
-              </a:spcAft>
-            </a:pPr>
-            <a:r>
-              <a:rPr sz="1500">
-                <a:solidFill>
-                  <a:srgbClr val="22282E"/>
-                </a:solidFill>
-              </a:rPr>
-              <a:t>•  Due diligence: investigar y comprender continuamente los riesgos. Clave: "el proceso de asegurarse de que se hace lo correcto".</a:t>
-            </a:r>
-          </a:p>
-          <a:p>
-            <a:pPr>
-              <a:spcAft>
-                <a:spcPts val="600"/>
-              </a:spcAft>
-            </a:pPr>
-            <a:r>
-              <a:rPr sz="1500">
-                <a:solidFill>
-                  <a:srgbClr val="22282E"/>
-                </a:solidFill>
-              </a:rPr>
-              <a:t>•  Propietario de datos (data owner): responsable de clasificar la información y decidir quién accede. Clave: rol de negocio, indelegable.</a:t>
-            </a:r>
-          </a:p>
-          <a:p>
-            <a:pPr>
-              <a:spcAft>
-                <a:spcPts val="600"/>
-              </a:spcAft>
-            </a:pPr>
-            <a:r>
-              <a:rPr sz="1500">
-                <a:solidFill>
-                  <a:srgbClr val="22282E"/>
-                </a:solidFill>
-              </a:rPr>
-              <a:t>•  Custodio de datos (data custodian): implementa y mantiene los controles definidos por el propietario. Clave: rol técnico/operativo.</a:t>
+              <a:t>•  Gobernar seguridad significa decidir objetivos, autoridad, apetito de riesgo y rendición de cuentas; gestionar significa ejecutar esas decisiones. Un comité que recibe métricas pero no puede…</a:t>
+            </a:r>
+          </a:p>
+          <a:p>
+            <a:pPr>
+              <a:spcAft>
+                <a:spcPts val="600"/>
+              </a:spcAft>
+            </a:pPr>
+            <a:r>
+              <a:rPr sz="1500">
+                <a:solidFill>
+                  <a:srgbClr val="22282E"/>
+                </a:solidFill>
+              </a:rPr>
+              <a:t>•  Una excepción de MFA permanece abierta porque nadie acepta el riesgo. El CISO documenta exposición y opciones; el dueño de negocio decide dentro de su autoridad y el comité escala si supera apetito.…</a:t>
             </a:r>
           </a:p>
         </p:txBody>
@@ -4286,7 +4737,7 @@
                   <a:srgbClr val="0B3D2E"/>
                 </a:solidFill>
               </a:rPr>
-              <a:t>🧰 Herramientas y preparación</a:t>
+              <a:t>📔 Glosario operativo</a:t>
             </a:r>
           </a:p>
         </p:txBody>
@@ -4324,82 +4775,52 @@
                   <a:srgbClr val="22282E"/>
                 </a:solidFill>
               </a:rPr>
-              <a:t>•  La gobernanza es una disciplina documental; las "herramientas" son plantillas y marcos. Prepara:</a:t>
-            </a:r>
-          </a:p>
-          <a:p>
-            <a:pPr>
-              <a:spcAft>
-                <a:spcPts val="600"/>
-              </a:spcAft>
-            </a:pPr>
-            <a:r>
-              <a:rPr sz="1500">
-                <a:solidFill>
-                  <a:srgbClr val="22282E"/>
-                </a:solidFill>
-              </a:rPr>
-              <a:t>•  Un editor de texto o Markdown para redactar el charter y la matriz RACI.</a:t>
-            </a:r>
-          </a:p>
-          <a:p>
-            <a:pPr>
-              <a:spcAft>
-                <a:spcPts val="600"/>
-              </a:spcAft>
-            </a:pPr>
-            <a:r>
-              <a:rPr sz="1500">
-                <a:solidFill>
-                  <a:srgbClr val="22282E"/>
-                </a:solidFill>
-              </a:rPr>
-              <a:t>•  Una hoja de cálculo (LibreOffice Calc, Excel o Google Sheets) para la matriz de roles.</a:t>
-            </a:r>
-          </a:p>
-          <a:p>
-            <a:pPr>
-              <a:spcAft>
-                <a:spcPts val="600"/>
-              </a:spcAft>
-            </a:pPr>
-            <a:r>
-              <a:rPr sz="1500">
-                <a:solidFill>
-                  <a:srgbClr val="22282E"/>
-                </a:solidFill>
-              </a:rPr>
-              <a:t>•  Referencias abiertas: ISO/IEC 27014 (gobernanza de seguridad), NIST SP 800-100 (Information Security Handbook), COBIT 2019 de ISACA.</a:t>
-            </a:r>
-          </a:p>
-          <a:p>
-            <a:pPr>
-              <a:spcAft>
-                <a:spcPts val="600"/>
-              </a:spcAft>
-            </a:pPr>
-            <a:r>
-              <a:rPr sz="1500">
-                <a:solidFill>
-                  <a:srgbClr val="22282E"/>
-                </a:solidFill>
-              </a:rPr>
-              <a:t>•  Opcional: una plantilla de política del SANS Policy Templates (&lt;https://www.sans.org/information-security-policy/&gt;) para inspirarte, sin copiar.</a:t>
-            </a:r>
-          </a:p>
-          <a:p>
-            <a:pPr>
-              <a:spcAft>
-                <a:spcPts val="600"/>
-              </a:spcAft>
-            </a:pPr>
-            <a:r>
-              <a:rPr sz="1500">
-                <a:solidFill>
-                  <a:srgbClr val="22282E"/>
-                </a:solidFill>
-              </a:rPr>
-              <a:t>•  No hay laboratorio ofensivo aquí; el trabajo es de análisis y redacción, propio de un rol de gobierno.</a:t>
+              <a:t>•  Término — Definición</a:t>
+            </a:r>
+          </a:p>
+          <a:p>
+            <a:pPr>
+              <a:spcAft>
+                <a:spcPts val="600"/>
+              </a:spcAft>
+            </a:pPr>
+            <a:r>
+              <a:rPr sz="1500">
+                <a:solidFill>
+                  <a:srgbClr val="22282E"/>
+                </a:solidFill>
+              </a:rPr>
+              <a:t>•  Apetito de riesgo — Cantidad y tipo de riesgo que la organización está dispuesta a perseguir o retener.</a:t>
+            </a:r>
+          </a:p>
+          <a:p>
+            <a:pPr>
+              <a:spcAft>
+                <a:spcPts val="600"/>
+              </a:spcAft>
+            </a:pPr>
+            <a:r>
+              <a:rPr sz="1500">
+                <a:solidFill>
+                  <a:srgbClr val="22282E"/>
+                </a:solidFill>
+              </a:rPr>
+              <a:t>•  Dueño de riesgo — Persona con autoridad para tratar o aceptar un riesgo dentro de límites.</a:t>
+            </a:r>
+          </a:p>
+          <a:p>
+            <a:pPr>
+              <a:spcAft>
+                <a:spcPts val="600"/>
+              </a:spcAft>
+            </a:pPr>
+            <a:r>
+              <a:rPr sz="1500">
+                <a:solidFill>
+                  <a:srgbClr val="22282E"/>
+                </a:solidFill>
+              </a:rPr>
+              <a:t>•  Assurance — Confianza sustentada en evidencia sobre diseño y operación.</a:t>
             </a:r>
           </a:p>
         </p:txBody>
@@ -4450,7 +4871,7 @@
                   <a:srgbClr val="0B3D2E"/>
                 </a:solidFill>
               </a:rPr>
-              <a:t>🧪 Laboratorio guiado (ejercicio aplicado)</a:t>
+              <a:t>✅ Criterio de dominio</a:t>
             </a:r>
           </a:p>
         </p:txBody>
@@ -4488,97 +4909,7 @@
                   <a:srgbClr val="22282E"/>
                 </a:solidFill>
               </a:rPr>
-              <a:t>•  Vas a construir la estructura de gobierno de seguridad de una empresa ficticia, "Ferretería del Sur S.A.", PYME de e-commerce con 120 empleados que procesa pagos con tarjeta.</a:t>
-            </a:r>
-          </a:p>
-          <a:p>
-            <a:pPr>
-              <a:spcAft>
-                <a:spcPts val="600"/>
-              </a:spcAft>
-            </a:pPr>
-            <a:r>
-              <a:rPr sz="1500">
-                <a:solidFill>
-                  <a:srgbClr val="22282E"/>
-                </a:solidFill>
-              </a:rPr>
-              <a:t>•  Contexto: anota en un documento el sector, tamaño, activos críticos (plataforma web, base de datos de clientes, pasarela de pago) y las 3 amenazas que más preocupan a la dirección.</a:t>
-            </a:r>
-          </a:p>
-          <a:p>
-            <a:pPr>
-              <a:spcAft>
-                <a:spcPts val="600"/>
-              </a:spcAft>
-            </a:pPr>
-            <a:r>
-              <a:rPr sz="1500">
-                <a:solidFill>
-                  <a:srgbClr val="22282E"/>
-                </a:solidFill>
-              </a:rPr>
-              <a:t>•  Matriz RACI de roles: en una hoja de cálculo crea filas para 6 actividades (definir política, aprobar presupuesto, clasificar datos, operar el SIEM, aprobar excepciones de riesgo, responder incidentes) y columnas para 5 roles (Junta, CEO, CISO, Propietario de datos, Equipo SOC). Marca cada celda con Responsable, Aprobador, Consultado o Informado. Regla: exactamente un A por fila.</a:t>
-            </a:r>
-          </a:p>
-          <a:p>
-            <a:pPr>
-              <a:spcAft>
-                <a:spcPts val="600"/>
-              </a:spcAft>
-            </a:pPr>
-            <a:r>
-              <a:rPr sz="1500">
-                <a:solidFill>
-                  <a:srgbClr val="22282E"/>
-                </a:solidFill>
-              </a:rPr>
-              <a:t>•  Apetito de riesgo: redacta una declaración de apetito en una frase (p. ej., "aceptamos riesgo bajo en disponibilidad y riesgo muy bajo en confidencialidad de datos de pago").</a:t>
-            </a:r>
-          </a:p>
-          <a:p>
-            <a:pPr>
-              <a:spcAft>
-                <a:spcPts val="600"/>
-              </a:spcAft>
-            </a:pPr>
-            <a:r>
-              <a:rPr sz="1500">
-                <a:solidFill>
-                  <a:srgbClr val="22282E"/>
-                </a:solidFill>
-              </a:rPr>
-              <a:t>•  Objetivos alineados: escribe una tabla de 3 filas que conecte un objetivo de negocio (crecer 30% en ventas online) con un objetivo de seguridad (disponibilidad 99,9%) y un control concreto (WAF + CDN).</a:t>
-            </a:r>
-          </a:p>
-          <a:p>
-            <a:pPr>
-              <a:spcAft>
-                <a:spcPts val="600"/>
-              </a:spcAft>
-            </a:pPr>
-            <a:r>
-              <a:rPr sz="1500">
-                <a:solidFill>
-                  <a:srgbClr val="22282E"/>
-                </a:solidFill>
-              </a:rPr>
-              <a:t>•  Charter del comité: redacta media página con: propósito, miembros, frecuencia de reunión, decisiones que puede tomar y a quién reporta.</a:t>
-            </a:r>
-          </a:p>
-          <a:p>
-            <a:pPr>
-              <a:spcAft>
-                <a:spcPts val="600"/>
-              </a:spcAft>
-            </a:pPr>
-            <a:r>
-              <a:rPr sz="1500">
-                <a:solidFill>
-                  <a:srgbClr val="22282E"/>
-                </a:solidFill>
-              </a:rPr>
-              <a:t>•  Revisión: verifica que ningún rol técnico aparezca como aprobador de decisiones estratégicas (eso es un error de gobierno).</a:t>
+              <a:t>•  El alumno distingue gobierno de gestión y diseña una ruta completa desde riesgo hasta decisión, responsable, evidencia y revisión.</a:t>
             </a:r>
           </a:p>
         </p:txBody>
@@ -4629,7 +4960,7 @@
                   <a:srgbClr val="0B3D2E"/>
                 </a:solidFill>
               </a:rPr>
-              <a:t>✍️ Ejercicios</a:t>
+              <a:t>📖 Definiciones y características</a:t>
             </a:r>
           </a:p>
         </p:txBody>
@@ -4667,82 +4998,97 @@
                   <a:srgbClr val="22282E"/>
                 </a:solidFill>
               </a:rPr>
-              <a:t>•  Explica con un ejemplo la diferencia entre due care y due diligence.</a:t>
-            </a:r>
-          </a:p>
-          <a:p>
-            <a:pPr>
-              <a:spcAft>
-                <a:spcPts val="600"/>
-              </a:spcAft>
-            </a:pPr>
-            <a:r>
-              <a:rPr sz="1500">
-                <a:solidFill>
-                  <a:srgbClr val="22282E"/>
-                </a:solidFill>
-              </a:rPr>
-              <a:t>•  Clasifica estas tareas en gobernanza, gestión u operación: aprobar el presupuesto anual, configurar un firewall, definir el apetito de riesgo, revisar logs.</a:t>
-            </a:r>
-          </a:p>
-          <a:p>
-            <a:pPr>
-              <a:spcAft>
-                <a:spcPts val="600"/>
-              </a:spcAft>
-            </a:pPr>
-            <a:r>
-              <a:rPr sz="1500">
-                <a:solidFill>
-                  <a:srgbClr val="22282E"/>
-                </a:solidFill>
-              </a:rPr>
-              <a:t>•  Diseña una matriz RACI para el proceso "gestión de parches".</a:t>
-            </a:r>
-          </a:p>
-          <a:p>
-            <a:pPr>
-              <a:spcAft>
-                <a:spcPts val="600"/>
-              </a:spcAft>
-            </a:pPr>
-            <a:r>
-              <a:rPr sz="1500">
-                <a:solidFill>
-                  <a:srgbClr val="22282E"/>
-                </a:solidFill>
-              </a:rPr>
-              <a:t>•  Un directivo dice: "la seguridad es cosa del departamento de IT". Redacta una réplica de 5 líneas fundamentada en gobernanza top-down.</a:t>
-            </a:r>
-          </a:p>
-          <a:p>
-            <a:pPr>
-              <a:spcAft>
-                <a:spcPts val="600"/>
-              </a:spcAft>
-            </a:pPr>
-            <a:r>
-              <a:rPr sz="1500">
-                <a:solidFill>
-                  <a:srgbClr val="22282E"/>
-                </a:solidFill>
-              </a:rPr>
-              <a:t>•  Define el apetito de riesgo para un hospital y para una startup de videojuegos; justifica por qué difieren.</a:t>
-            </a:r>
-          </a:p>
-          <a:p>
-            <a:pPr>
-              <a:spcAft>
-                <a:spcPts val="600"/>
-              </a:spcAft>
-            </a:pPr>
-            <a:r>
-              <a:rPr sz="1500">
-                <a:solidFill>
-                  <a:srgbClr val="22282E"/>
-                </a:solidFill>
-              </a:rPr>
-              <a:t>•  Propón tres indicadores que un comité de seguridad debería revisar en cada reunión.</a:t>
+              <a:t>•  Gobernanza de seguridad: conjunto de responsabilidades y prácticas ejercidas por la dirección para dar dirección estratégica, asegurar el logro de objetivos y verificar que el riesgo se gestiona.…</a:t>
+            </a:r>
+          </a:p>
+          <a:p>
+            <a:pPr>
+              <a:spcAft>
+                <a:spcPts val="600"/>
+              </a:spcAft>
+            </a:pPr>
+            <a:r>
+              <a:rPr sz="1500">
+                <a:solidFill>
+                  <a:srgbClr val="22282E"/>
+                </a:solidFill>
+              </a:rPr>
+              <a:t>•  Apetito de riesgo (risk appetite): cantidad de riesgo que una organización está dispuesta a aceptar para perseguir sus objetivos. Clave: se define arriba, guía todas las decisiones de tratamiento.</a:t>
+            </a:r>
+          </a:p>
+          <a:p>
+            <a:pPr>
+              <a:spcAft>
+                <a:spcPts val="600"/>
+              </a:spcAft>
+            </a:pPr>
+            <a:r>
+              <a:rPr sz="1500">
+                <a:solidFill>
+                  <a:srgbClr val="22282E"/>
+                </a:solidFill>
+              </a:rPr>
+              <a:t>•  Tolerancia al riesgo: la variación aceptable respecto al apetito para un riesgo concreto. Clave: más granular que el apetito.</a:t>
+            </a:r>
+          </a:p>
+          <a:p>
+            <a:pPr>
+              <a:spcAft>
+                <a:spcPts val="600"/>
+              </a:spcAft>
+            </a:pPr>
+            <a:r>
+              <a:rPr sz="1500">
+                <a:solidFill>
+                  <a:srgbClr val="22282E"/>
+                </a:solidFill>
+              </a:rPr>
+              <a:t>•  Due care: actuar de forma razonable y prudente para proteger los intereses de la organización. Clave: "hacer lo correcto".</a:t>
+            </a:r>
+          </a:p>
+          <a:p>
+            <a:pPr>
+              <a:spcAft>
+                <a:spcPts val="600"/>
+              </a:spcAft>
+            </a:pPr>
+            <a:r>
+              <a:rPr sz="1500">
+                <a:solidFill>
+                  <a:srgbClr val="22282E"/>
+                </a:solidFill>
+              </a:rPr>
+              <a:t>•  Due diligence: investigar y comprender continuamente los riesgos. Clave: "el proceso de asegurarse de que se hace lo correcto".</a:t>
+            </a:r>
+          </a:p>
+          <a:p>
+            <a:pPr>
+              <a:spcAft>
+                <a:spcPts val="600"/>
+              </a:spcAft>
+            </a:pPr>
+            <a:r>
+              <a:rPr sz="1500">
+                <a:solidFill>
+                  <a:srgbClr val="22282E"/>
+                </a:solidFill>
+              </a:rPr>
+              <a:t>•  Propietario de datos (data owner): responsable de clasificar la información y decidir quién accede. Clave: rol de negocio, indelegable.</a:t>
+            </a:r>
+          </a:p>
+          <a:p>
+            <a:pPr>
+              <a:spcAft>
+                <a:spcPts val="600"/>
+              </a:spcAft>
+            </a:pPr>
+            <a:r>
+              <a:rPr sz="1500">
+                <a:solidFill>
+                  <a:srgbClr val="22282E"/>
+                </a:solidFill>
+              </a:rPr>
+              <a:t>•  Custodio de datos (data custodian): implementa y mantiene los controles definidos por el propietario. Clave: rol técnico/operativo.</a:t>
             </a:r>
           </a:p>
         </p:txBody>
@@ -4793,7 +5139,7 @@
                   <a:srgbClr val="0B3D2E"/>
                 </a:solidFill>
               </a:rPr>
-              <a:t>📝 Reto verificable</a:t>
+              <a:t>🧰 Herramientas y preparación</a:t>
             </a:r>
           </a:p>
         </p:txBody>
@@ -4831,22 +5177,82 @@
                   <a:srgbClr val="22282E"/>
                 </a:solidFill>
               </a:rPr>
-              <a:t>•  Redacta el charter completo de un comité de seguridad de la información (máx. 1 página) para "Ferretería del Sur S.A.", con matriz RACI adjunta.</a:t>
-            </a:r>
-          </a:p>
-          <a:p>
-            <a:pPr>
-              <a:spcAft>
-                <a:spcPts val="600"/>
-              </a:spcAft>
-            </a:pPr>
-            <a:r>
-              <a:rPr sz="1500">
-                <a:solidFill>
-                  <a:srgbClr val="22282E"/>
-                </a:solidFill>
-              </a:rPr>
-              <a:t>•  Criterio de aceptación: el charter incluye propósito, composición, cadencia, autoridad de decisión y línea de reporte a la junta; la matriz RACI tiene exactamente un aprobador por actividad y ningún rol técnico aprueba decisiones estratégicas.</a:t>
+              <a:t>•  La gobernanza es una disciplina documental; las "herramientas" son plantillas y marcos. Prepara:</a:t>
+            </a:r>
+          </a:p>
+          <a:p>
+            <a:pPr>
+              <a:spcAft>
+                <a:spcPts val="600"/>
+              </a:spcAft>
+            </a:pPr>
+            <a:r>
+              <a:rPr sz="1500">
+                <a:solidFill>
+                  <a:srgbClr val="22282E"/>
+                </a:solidFill>
+              </a:rPr>
+              <a:t>•  Un editor de texto o Markdown para redactar el charter y la matriz RACI.</a:t>
+            </a:r>
+          </a:p>
+          <a:p>
+            <a:pPr>
+              <a:spcAft>
+                <a:spcPts val="600"/>
+              </a:spcAft>
+            </a:pPr>
+            <a:r>
+              <a:rPr sz="1500">
+                <a:solidFill>
+                  <a:srgbClr val="22282E"/>
+                </a:solidFill>
+              </a:rPr>
+              <a:t>•  Una hoja de cálculo (LibreOffice Calc, Excel o Google Sheets) para la matriz de roles.</a:t>
+            </a:r>
+          </a:p>
+          <a:p>
+            <a:pPr>
+              <a:spcAft>
+                <a:spcPts val="600"/>
+              </a:spcAft>
+            </a:pPr>
+            <a:r>
+              <a:rPr sz="1500">
+                <a:solidFill>
+                  <a:srgbClr val="22282E"/>
+                </a:solidFill>
+              </a:rPr>
+              <a:t>•  Referencias abiertas: ISO/IEC 27014 (gobernanza de seguridad), NIST SP 800-100 (Information Security Handbook), COBIT 2019 de ISACA.</a:t>
+            </a:r>
+          </a:p>
+          <a:p>
+            <a:pPr>
+              <a:spcAft>
+                <a:spcPts val="600"/>
+              </a:spcAft>
+            </a:pPr>
+            <a:r>
+              <a:rPr sz="1500">
+                <a:solidFill>
+                  <a:srgbClr val="22282E"/>
+                </a:solidFill>
+              </a:rPr>
+              <a:t>•  Opcional: una plantilla de política del SANS Policy Templates (&lt;https://www.sans.org/information-security-policy/&gt;) para inspirarte, sin copiar.</a:t>
+            </a:r>
+          </a:p>
+          <a:p>
+            <a:pPr>
+              <a:spcAft>
+                <a:spcPts val="600"/>
+              </a:spcAft>
+            </a:pPr>
+            <a:r>
+              <a:rPr sz="1500">
+                <a:solidFill>
+                  <a:srgbClr val="22282E"/>
+                </a:solidFill>
+              </a:rPr>
+              <a:t>•  No hay laboratorio ofensivo aquí; el trabajo es de análisis y redacción, propio de un rol de gobierno.</a:t>
             </a:r>
           </a:p>
         </p:txBody>
